--- a/assets/powerpoints/module-consultation/A2-trois-sons-dans-le-nez.pptx
+++ b/assets/powerpoints/module-consultation/A2-trois-sons-dans-le-nez.pptx
@@ -4645,7 +4645,7 @@
             <a:r>
               <a:rPr sz="1300" b="1" i="0" spc="156">
                 <a:solidFill>
-                  <a:srgbClr val="6B4FBB"/>
+                  <a:srgbClr val="3B49A0"/>
                 </a:solidFill>
                 <a:latin typeface="Verdana"/>
               </a:rPr>
@@ -4985,7 +4985,7 @@
             <a:r>
               <a:rPr sz="1300" b="1" i="0" spc="156">
                 <a:solidFill>
-                  <a:srgbClr val="6B4FBB"/>
+                  <a:srgbClr val="3B49A0"/>
                 </a:solidFill>
                 <a:latin typeface="Verdana"/>
               </a:rPr>
@@ -5534,7 +5534,7 @@
             <a:r>
               <a:rPr sz="1300" b="1" i="0" spc="156">
                 <a:solidFill>
-                  <a:srgbClr val="6B4FBB"/>
+                  <a:srgbClr val="3B49A0"/>
                 </a:solidFill>
                 <a:latin typeface="Verdana"/>
               </a:rPr>
@@ -6083,7 +6083,7 @@
             <a:r>
               <a:rPr sz="1300" b="1" i="0" spc="156">
                 <a:solidFill>
-                  <a:srgbClr val="6B4FBB"/>
+                  <a:srgbClr val="3B49A0"/>
                 </a:solidFill>
                 <a:latin typeface="Verdana"/>
               </a:rPr>
@@ -6233,7 +6233,7 @@
             </a:avLst>
           </a:prstGeom>
           <a:solidFill>
-            <a:srgbClr val="EFEAFA"/>
+            <a:srgbClr val="E8EAFA"/>
           </a:solidFill>
           <a:ln>
             <a:noFill/>
@@ -6290,7 +6290,7 @@
             <a:r>
               <a:rPr sz="1500" b="1" i="0">
                 <a:solidFill>
-                  <a:srgbClr val="6B4FBB"/>
+                  <a:srgbClr val="3B49A0"/>
                 </a:solidFill>
                 <a:latin typeface="Verdana"/>
               </a:rPr>
@@ -6401,7 +6401,7 @@
             </a:avLst>
           </a:prstGeom>
           <a:solidFill>
-            <a:srgbClr val="EFEAFA"/>
+            <a:srgbClr val="E8EAFA"/>
           </a:solidFill>
           <a:ln>
             <a:noFill/>
@@ -6458,7 +6458,7 @@
             <a:r>
               <a:rPr sz="1500" b="1" i="0">
                 <a:solidFill>
-                  <a:srgbClr val="6B4FBB"/>
+                  <a:srgbClr val="3B49A0"/>
                 </a:solidFill>
                 <a:latin typeface="Verdana"/>
               </a:rPr>
@@ -6569,7 +6569,7 @@
             </a:avLst>
           </a:prstGeom>
           <a:solidFill>
-            <a:srgbClr val="EFEAFA"/>
+            <a:srgbClr val="E8EAFA"/>
           </a:solidFill>
           <a:ln>
             <a:noFill/>
@@ -6626,7 +6626,7 @@
             <a:r>
               <a:rPr sz="1500" b="1" i="0">
                 <a:solidFill>
-                  <a:srgbClr val="6B4FBB"/>
+                  <a:srgbClr val="3B49A0"/>
                 </a:solidFill>
                 <a:latin typeface="Verdana"/>
               </a:rPr>
@@ -6737,7 +6737,7 @@
             </a:avLst>
           </a:prstGeom>
           <a:solidFill>
-            <a:srgbClr val="EFEAFA"/>
+            <a:srgbClr val="E8EAFA"/>
           </a:solidFill>
           <a:ln>
             <a:noFill/>
@@ -6794,7 +6794,7 @@
             <a:r>
               <a:rPr sz="1500" b="1" i="0">
                 <a:solidFill>
-                  <a:srgbClr val="6B4FBB"/>
+                  <a:srgbClr val="3B49A0"/>
                 </a:solidFill>
                 <a:latin typeface="Verdana"/>
               </a:rPr>
@@ -6905,7 +6905,7 @@
             </a:avLst>
           </a:prstGeom>
           <a:solidFill>
-            <a:srgbClr val="EFEAFA"/>
+            <a:srgbClr val="E8EAFA"/>
           </a:solidFill>
           <a:ln>
             <a:noFill/>
@@ -6962,7 +6962,7 @@
             <a:r>
               <a:rPr sz="1500" b="1" i="0">
                 <a:solidFill>
-                  <a:srgbClr val="6B4FBB"/>
+                  <a:srgbClr val="3B49A0"/>
                 </a:solidFill>
                 <a:latin typeface="Verdana"/>
               </a:rPr>
@@ -7073,7 +7073,7 @@
             </a:avLst>
           </a:prstGeom>
           <a:solidFill>
-            <a:srgbClr val="EFEAFA"/>
+            <a:srgbClr val="E8EAFA"/>
           </a:solidFill>
           <a:ln>
             <a:noFill/>
@@ -7130,7 +7130,7 @@
             <a:r>
               <a:rPr sz="1500" b="1" i="0">
                 <a:solidFill>
-                  <a:srgbClr val="6B4FBB"/>
+                  <a:srgbClr val="3B49A0"/>
                 </a:solidFill>
                 <a:latin typeface="Verdana"/>
               </a:rPr>
@@ -7346,7 +7346,7 @@
             <a:r>
               <a:rPr sz="1300" b="1" i="0" spc="156">
                 <a:solidFill>
-                  <a:srgbClr val="6B4FBB"/>
+                  <a:srgbClr val="3B49A0"/>
                 </a:solidFill>
                 <a:latin typeface="Verdana"/>
               </a:rPr>
@@ -7496,7 +7496,7 @@
             </a:avLst>
           </a:prstGeom>
           <a:solidFill>
-            <a:srgbClr val="EFEAFA"/>
+            <a:srgbClr val="E8EAFA"/>
           </a:solidFill>
           <a:ln>
             <a:noFill/>
@@ -7553,7 +7553,7 @@
             <a:r>
               <a:rPr sz="1500" b="1" i="0">
                 <a:solidFill>
-                  <a:srgbClr val="6B4FBB"/>
+                  <a:srgbClr val="3B49A0"/>
                 </a:solidFill>
                 <a:latin typeface="Verdana"/>
               </a:rPr>
@@ -7673,7 +7673,7 @@
             </a:avLst>
           </a:prstGeom>
           <a:solidFill>
-            <a:srgbClr val="EFEAFA"/>
+            <a:srgbClr val="E8EAFA"/>
           </a:solidFill>
           <a:ln>
             <a:noFill/>
@@ -7730,7 +7730,7 @@
             <a:r>
               <a:rPr sz="1500" b="1" i="0">
                 <a:solidFill>
-                  <a:srgbClr val="6B4FBB"/>
+                  <a:srgbClr val="3B49A0"/>
                 </a:solidFill>
                 <a:latin typeface="Verdana"/>
               </a:rPr>
@@ -7850,7 +7850,7 @@
             </a:avLst>
           </a:prstGeom>
           <a:solidFill>
-            <a:srgbClr val="EFEAFA"/>
+            <a:srgbClr val="E8EAFA"/>
           </a:solidFill>
           <a:ln>
             <a:noFill/>
@@ -7907,7 +7907,7 @@
             <a:r>
               <a:rPr sz="1500" b="1" i="0">
                 <a:solidFill>
-                  <a:srgbClr val="6B4FBB"/>
+                  <a:srgbClr val="3B49A0"/>
                 </a:solidFill>
                 <a:latin typeface="Verdana"/>
               </a:rPr>
@@ -8027,7 +8027,7 @@
             </a:avLst>
           </a:prstGeom>
           <a:solidFill>
-            <a:srgbClr val="EFEAFA"/>
+            <a:srgbClr val="E8EAFA"/>
           </a:solidFill>
           <a:ln>
             <a:noFill/>
@@ -8084,7 +8084,7 @@
             <a:r>
               <a:rPr sz="1500" b="1" i="0">
                 <a:solidFill>
-                  <a:srgbClr val="6B4FBB"/>
+                  <a:srgbClr val="3B49A0"/>
                 </a:solidFill>
                 <a:latin typeface="Verdana"/>
               </a:rPr>
@@ -8204,7 +8204,7 @@
             </a:avLst>
           </a:prstGeom>
           <a:solidFill>
-            <a:srgbClr val="EFEAFA"/>
+            <a:srgbClr val="E8EAFA"/>
           </a:solidFill>
           <a:ln>
             <a:noFill/>
@@ -8261,7 +8261,7 @@
             <a:r>
               <a:rPr sz="1500" b="1" i="0">
                 <a:solidFill>
-                  <a:srgbClr val="6B4FBB"/>
+                  <a:srgbClr val="3B49A0"/>
                 </a:solidFill>
                 <a:latin typeface="Verdana"/>
               </a:rPr>
@@ -8381,7 +8381,7 @@
             </a:avLst>
           </a:prstGeom>
           <a:solidFill>
-            <a:srgbClr val="EFEAFA"/>
+            <a:srgbClr val="E8EAFA"/>
           </a:solidFill>
           <a:ln>
             <a:noFill/>
@@ -8438,7 +8438,7 @@
             <a:r>
               <a:rPr sz="1500" b="1" i="0">
                 <a:solidFill>
-                  <a:srgbClr val="6B4FBB"/>
+                  <a:srgbClr val="3B49A0"/>
                 </a:solidFill>
                 <a:latin typeface="Verdana"/>
               </a:rPr>
@@ -8663,7 +8663,7 @@
             <a:r>
               <a:rPr sz="1300" b="1" i="0" spc="156">
                 <a:solidFill>
-                  <a:srgbClr val="6B4FBB"/>
+                  <a:srgbClr val="3B49A0"/>
                 </a:solidFill>
                 <a:latin typeface="Verdana"/>
               </a:rPr>
@@ -8813,7 +8813,7 @@
             </a:avLst>
           </a:prstGeom>
           <a:solidFill>
-            <a:srgbClr val="EFEAFA"/>
+            <a:srgbClr val="E8EAFA"/>
           </a:solidFill>
           <a:ln>
             <a:noFill/>
@@ -8870,7 +8870,7 @@
             <a:r>
               <a:rPr sz="1500" b="1" i="0">
                 <a:solidFill>
-                  <a:srgbClr val="6B4FBB"/>
+                  <a:srgbClr val="3B49A0"/>
                 </a:solidFill>
                 <a:latin typeface="Verdana"/>
               </a:rPr>
@@ -8981,7 +8981,7 @@
             </a:avLst>
           </a:prstGeom>
           <a:solidFill>
-            <a:srgbClr val="EFEAFA"/>
+            <a:srgbClr val="E8EAFA"/>
           </a:solidFill>
           <a:ln>
             <a:noFill/>
@@ -9038,7 +9038,7 @@
             <a:r>
               <a:rPr sz="1500" b="1" i="0">
                 <a:solidFill>
-                  <a:srgbClr val="6B4FBB"/>
+                  <a:srgbClr val="3B49A0"/>
                 </a:solidFill>
                 <a:latin typeface="Verdana"/>
               </a:rPr>
@@ -9149,7 +9149,7 @@
             </a:avLst>
           </a:prstGeom>
           <a:solidFill>
-            <a:srgbClr val="EFEAFA"/>
+            <a:srgbClr val="E8EAFA"/>
           </a:solidFill>
           <a:ln>
             <a:noFill/>
@@ -9206,7 +9206,7 @@
             <a:r>
               <a:rPr sz="1500" b="1" i="0">
                 <a:solidFill>
-                  <a:srgbClr val="6B4FBB"/>
+                  <a:srgbClr val="3B49A0"/>
                 </a:solidFill>
                 <a:latin typeface="Verdana"/>
               </a:rPr>
@@ -9422,7 +9422,7 @@
             <a:r>
               <a:rPr sz="1300" b="1" i="0" spc="156">
                 <a:solidFill>
-                  <a:srgbClr val="6B4FBB"/>
+                  <a:srgbClr val="3B49A0"/>
                 </a:solidFill>
                 <a:latin typeface="Verdana"/>
               </a:rPr>
@@ -9572,7 +9572,7 @@
             </a:avLst>
           </a:prstGeom>
           <a:solidFill>
-            <a:srgbClr val="EFEAFA"/>
+            <a:srgbClr val="E8EAFA"/>
           </a:solidFill>
           <a:ln>
             <a:noFill/>
@@ -9629,7 +9629,7 @@
             <a:r>
               <a:rPr sz="1500" b="1" i="0">
                 <a:solidFill>
-                  <a:srgbClr val="6B4FBB"/>
+                  <a:srgbClr val="3B49A0"/>
                 </a:solidFill>
                 <a:latin typeface="Verdana"/>
               </a:rPr>
@@ -9749,7 +9749,7 @@
             </a:avLst>
           </a:prstGeom>
           <a:solidFill>
-            <a:srgbClr val="EFEAFA"/>
+            <a:srgbClr val="E8EAFA"/>
           </a:solidFill>
           <a:ln>
             <a:noFill/>
@@ -9806,7 +9806,7 @@
             <a:r>
               <a:rPr sz="1500" b="1" i="0">
                 <a:solidFill>
-                  <a:srgbClr val="6B4FBB"/>
+                  <a:srgbClr val="3B49A0"/>
                 </a:solidFill>
                 <a:latin typeface="Verdana"/>
               </a:rPr>
@@ -9926,7 +9926,7 @@
             </a:avLst>
           </a:prstGeom>
           <a:solidFill>
-            <a:srgbClr val="EFEAFA"/>
+            <a:srgbClr val="E8EAFA"/>
           </a:solidFill>
           <a:ln>
             <a:noFill/>
@@ -9983,7 +9983,7 @@
             <a:r>
               <a:rPr sz="1500" b="1" i="0">
                 <a:solidFill>
-                  <a:srgbClr val="6B4FBB"/>
+                  <a:srgbClr val="3B49A0"/>
                 </a:solidFill>
                 <a:latin typeface="Verdana"/>
               </a:rPr>
@@ -10671,7 +10671,7 @@
             <a:r>
               <a:rPr sz="1300" b="1" i="0" spc="156">
                 <a:solidFill>
-                  <a:srgbClr val="6B4FBB"/>
+                  <a:srgbClr val="3B49A0"/>
                 </a:solidFill>
                 <a:latin typeface="Verdana"/>
               </a:rPr>
@@ -10782,7 +10782,7 @@
             </a:avLst>
           </a:prstGeom>
           <a:solidFill>
-            <a:srgbClr val="EFEAFA"/>
+            <a:srgbClr val="E8EAFA"/>
           </a:solidFill>
           <a:ln>
             <a:noFill/>
@@ -10839,7 +10839,7 @@
             <a:r>
               <a:rPr sz="1500" b="1" i="0">
                 <a:solidFill>
-                  <a:srgbClr val="6B4FBB"/>
+                  <a:srgbClr val="3B49A0"/>
                 </a:solidFill>
                 <a:latin typeface="Verdana"/>
               </a:rPr>
@@ -10950,7 +10950,7 @@
             </a:avLst>
           </a:prstGeom>
           <a:solidFill>
-            <a:srgbClr val="EFEAFA"/>
+            <a:srgbClr val="E8EAFA"/>
           </a:solidFill>
           <a:ln>
             <a:noFill/>
@@ -11007,7 +11007,7 @@
             <a:r>
               <a:rPr sz="1500" b="1" i="0">
                 <a:solidFill>
-                  <a:srgbClr val="6B4FBB"/>
+                  <a:srgbClr val="3B49A0"/>
                 </a:solidFill>
                 <a:latin typeface="Verdana"/>
               </a:rPr>
@@ -11118,7 +11118,7 @@
             </a:avLst>
           </a:prstGeom>
           <a:solidFill>
-            <a:srgbClr val="EFEAFA"/>
+            <a:srgbClr val="E8EAFA"/>
           </a:solidFill>
           <a:ln>
             <a:noFill/>
@@ -11175,7 +11175,7 @@
             <a:r>
               <a:rPr sz="1500" b="1" i="0">
                 <a:solidFill>
-                  <a:srgbClr val="6B4FBB"/>
+                  <a:srgbClr val="3B49A0"/>
                 </a:solidFill>
                 <a:latin typeface="Verdana"/>
               </a:rPr>
@@ -11286,7 +11286,7 @@
             </a:avLst>
           </a:prstGeom>
           <a:solidFill>
-            <a:srgbClr val="EFEAFA"/>
+            <a:srgbClr val="E8EAFA"/>
           </a:solidFill>
           <a:ln>
             <a:noFill/>
@@ -11343,7 +11343,7 @@
             <a:r>
               <a:rPr sz="1500" b="1" i="0">
                 <a:solidFill>
-                  <a:srgbClr val="6B4FBB"/>
+                  <a:srgbClr val="3B49A0"/>
                 </a:solidFill>
                 <a:latin typeface="Verdana"/>
               </a:rPr>
@@ -11559,7 +11559,7 @@
             <a:r>
               <a:rPr sz="1300" b="1" i="0" spc="156">
                 <a:solidFill>
-                  <a:srgbClr val="6B4FBB"/>
+                  <a:srgbClr val="3B49A0"/>
                 </a:solidFill>
                 <a:latin typeface="Verdana"/>
               </a:rPr>
@@ -11585,7 +11585,7 @@
             </a:avLst>
           </a:prstGeom>
           <a:solidFill>
-            <a:srgbClr val="EFEAFA"/>
+            <a:srgbClr val="E8EAFA"/>
           </a:solidFill>
           <a:ln w="12700">
             <a:solidFill>
@@ -11906,7 +11906,7 @@
             <a:r>
               <a:rPr sz="1300" b="1" i="0" spc="156">
                 <a:solidFill>
-                  <a:srgbClr val="6B4FBB"/>
+                  <a:srgbClr val="3B49A0"/>
                 </a:solidFill>
                 <a:latin typeface="Verdana"/>
               </a:rPr>
@@ -12147,7 +12147,7 @@
             <a:r>
               <a:rPr sz="1800" b="1" i="0">
                 <a:solidFill>
-                  <a:srgbClr val="6B4FBB"/>
+                  <a:srgbClr val="3B49A0"/>
                 </a:solidFill>
                 <a:latin typeface="Verdana"/>
               </a:rPr>
@@ -12306,7 +12306,7 @@
             <a:r>
               <a:rPr sz="1800" b="1" i="0">
                 <a:solidFill>
-                  <a:srgbClr val="6B4FBB"/>
+                  <a:srgbClr val="3B49A0"/>
                 </a:solidFill>
                 <a:latin typeface="Verdana"/>
               </a:rPr>
@@ -12465,7 +12465,7 @@
             <a:r>
               <a:rPr sz="1800" b="1" i="0">
                 <a:solidFill>
-                  <a:srgbClr val="6B4FBB"/>
+                  <a:srgbClr val="3B49A0"/>
                 </a:solidFill>
                 <a:latin typeface="Verdana"/>
               </a:rPr>
@@ -12805,7 +12805,7 @@
             <a:r>
               <a:rPr sz="1300" b="1" i="0" spc="156">
                 <a:solidFill>
-                  <a:srgbClr val="6B4FBB"/>
+                  <a:srgbClr val="3B49A0"/>
                 </a:solidFill>
                 <a:latin typeface="Verdana"/>
               </a:rPr>
@@ -12929,7 +12929,7 @@
             <a:r>
               <a:rPr sz="2100" b="1" i="0">
                 <a:solidFill>
-                  <a:srgbClr val="6B4FBB"/>
+                  <a:srgbClr val="3B49A0"/>
                 </a:solidFill>
                 <a:latin typeface="Verdana"/>
               </a:rPr>
@@ -13053,7 +13053,7 @@
             <a:r>
               <a:rPr sz="2100" b="1" i="0">
                 <a:solidFill>
-                  <a:srgbClr val="6B4FBB"/>
+                  <a:srgbClr val="3B49A0"/>
                 </a:solidFill>
                 <a:latin typeface="Verdana"/>
               </a:rPr>
@@ -13177,7 +13177,7 @@
             <a:r>
               <a:rPr sz="2100" b="1" i="0">
                 <a:solidFill>
-                  <a:srgbClr val="6B4FBB"/>
+                  <a:srgbClr val="3B49A0"/>
                 </a:solidFill>
                 <a:latin typeface="Verdana"/>
               </a:rPr>
@@ -13301,7 +13301,7 @@
             <a:r>
               <a:rPr sz="2100" b="1" i="0">
                 <a:solidFill>
-                  <a:srgbClr val="6B4FBB"/>
+                  <a:srgbClr val="3B49A0"/>
                 </a:solidFill>
                 <a:latin typeface="Verdana"/>
               </a:rPr>
@@ -13517,7 +13517,7 @@
             <a:r>
               <a:rPr sz="1300" b="1" i="0" spc="156">
                 <a:solidFill>
-                  <a:srgbClr val="6B4FBB"/>
+                  <a:srgbClr val="3B49A0"/>
                 </a:solidFill>
                 <a:latin typeface="Verdana"/>
               </a:rPr>
@@ -13543,7 +13543,7 @@
             </a:avLst>
           </a:prstGeom>
           <a:solidFill>
-            <a:srgbClr val="EFEAFA"/>
+            <a:srgbClr val="E8EAFA"/>
           </a:solidFill>
           <a:ln w="12700">
             <a:solidFill>
@@ -13864,7 +13864,7 @@
             <a:r>
               <a:rPr sz="1300" b="1" i="0" spc="156">
                 <a:solidFill>
-                  <a:srgbClr val="6B4FBB"/>
+                  <a:srgbClr val="3B49A0"/>
                 </a:solidFill>
                 <a:latin typeface="Verdana"/>
               </a:rPr>
@@ -14014,7 +14014,7 @@
             </a:avLst>
           </a:prstGeom>
           <a:solidFill>
-            <a:srgbClr val="EFEAFA"/>
+            <a:srgbClr val="E8EAFA"/>
           </a:solidFill>
           <a:ln>
             <a:noFill/>
@@ -14071,7 +14071,7 @@
             <a:r>
               <a:rPr sz="1500" b="1" i="0">
                 <a:solidFill>
-                  <a:srgbClr val="6B4FBB"/>
+                  <a:srgbClr val="3B49A0"/>
                 </a:solidFill>
                 <a:latin typeface="Verdana"/>
               </a:rPr>
@@ -14182,7 +14182,7 @@
             </a:avLst>
           </a:prstGeom>
           <a:solidFill>
-            <a:srgbClr val="EFEAFA"/>
+            <a:srgbClr val="E8EAFA"/>
           </a:solidFill>
           <a:ln>
             <a:noFill/>
@@ -14239,7 +14239,7 @@
             <a:r>
               <a:rPr sz="1500" b="1" i="0">
                 <a:solidFill>
-                  <a:srgbClr val="6B4FBB"/>
+                  <a:srgbClr val="3B49A0"/>
                 </a:solidFill>
                 <a:latin typeface="Verdana"/>
               </a:rPr>
@@ -14350,7 +14350,7 @@
             </a:avLst>
           </a:prstGeom>
           <a:solidFill>
-            <a:srgbClr val="EFEAFA"/>
+            <a:srgbClr val="E8EAFA"/>
           </a:solidFill>
           <a:ln>
             <a:noFill/>
@@ -14407,7 +14407,7 @@
             <a:r>
               <a:rPr sz="1500" b="1" i="0">
                 <a:solidFill>
-                  <a:srgbClr val="6B4FBB"/>
+                  <a:srgbClr val="3B49A0"/>
                 </a:solidFill>
                 <a:latin typeface="Verdana"/>
               </a:rPr>
@@ -14518,7 +14518,7 @@
             </a:avLst>
           </a:prstGeom>
           <a:solidFill>
-            <a:srgbClr val="EFEAFA"/>
+            <a:srgbClr val="E8EAFA"/>
           </a:solidFill>
           <a:ln>
             <a:noFill/>
@@ -14575,7 +14575,7 @@
             <a:r>
               <a:rPr sz="1500" b="1" i="0">
                 <a:solidFill>
-                  <a:srgbClr val="6B4FBB"/>
+                  <a:srgbClr val="3B49A0"/>
                 </a:solidFill>
                 <a:latin typeface="Verdana"/>
               </a:rPr>
@@ -14686,7 +14686,7 @@
             </a:avLst>
           </a:prstGeom>
           <a:solidFill>
-            <a:srgbClr val="EFEAFA"/>
+            <a:srgbClr val="E8EAFA"/>
           </a:solidFill>
           <a:ln>
             <a:noFill/>
@@ -14743,7 +14743,7 @@
             <a:r>
               <a:rPr sz="1500" b="1" i="0">
                 <a:solidFill>
-                  <a:srgbClr val="6B4FBB"/>
+                  <a:srgbClr val="3B49A0"/>
                 </a:solidFill>
                 <a:latin typeface="Verdana"/>
               </a:rPr>
@@ -14854,7 +14854,7 @@
             </a:avLst>
           </a:prstGeom>
           <a:solidFill>
-            <a:srgbClr val="EFEAFA"/>
+            <a:srgbClr val="E8EAFA"/>
           </a:solidFill>
           <a:ln>
             <a:noFill/>
@@ -14911,7 +14911,7 @@
             <a:r>
               <a:rPr sz="1500" b="1" i="0">
                 <a:solidFill>
-                  <a:srgbClr val="6B4FBB"/>
+                  <a:srgbClr val="3B49A0"/>
                 </a:solidFill>
                 <a:latin typeface="Verdana"/>
               </a:rPr>
@@ -15022,7 +15022,7 @@
             </a:avLst>
           </a:prstGeom>
           <a:solidFill>
-            <a:srgbClr val="EFEAFA"/>
+            <a:srgbClr val="E8EAFA"/>
           </a:solidFill>
           <a:ln>
             <a:noFill/>
@@ -15079,7 +15079,7 @@
             <a:r>
               <a:rPr sz="1500" b="1" i="0">
                 <a:solidFill>
-                  <a:srgbClr val="6B4FBB"/>
+                  <a:srgbClr val="3B49A0"/>
                 </a:solidFill>
                 <a:latin typeface="Verdana"/>
               </a:rPr>
@@ -15190,7 +15190,7 @@
             </a:avLst>
           </a:prstGeom>
           <a:solidFill>
-            <a:srgbClr val="EFEAFA"/>
+            <a:srgbClr val="E8EAFA"/>
           </a:solidFill>
           <a:ln>
             <a:noFill/>
@@ -15247,7 +15247,7 @@
             <a:r>
               <a:rPr sz="1500" b="1" i="0">
                 <a:solidFill>
-                  <a:srgbClr val="6B4FBB"/>
+                  <a:srgbClr val="3B49A0"/>
                 </a:solidFill>
                 <a:latin typeface="Verdana"/>
               </a:rPr>
@@ -15463,7 +15463,7 @@
             <a:r>
               <a:rPr sz="1300" b="1" i="0" spc="156">
                 <a:solidFill>
-                  <a:srgbClr val="6B4FBB"/>
+                  <a:srgbClr val="3B49A0"/>
                 </a:solidFill>
                 <a:latin typeface="Verdana"/>
               </a:rPr>
@@ -15613,7 +15613,7 @@
             </a:avLst>
           </a:prstGeom>
           <a:solidFill>
-            <a:srgbClr val="EFEAFA"/>
+            <a:srgbClr val="E8EAFA"/>
           </a:solidFill>
           <a:ln>
             <a:noFill/>
@@ -15670,7 +15670,7 @@
             <a:r>
               <a:rPr sz="1500" b="1" i="0">
                 <a:solidFill>
-                  <a:srgbClr val="6B4FBB"/>
+                  <a:srgbClr val="3B49A0"/>
                 </a:solidFill>
                 <a:latin typeface="Verdana"/>
               </a:rPr>
@@ -15790,7 +15790,7 @@
             </a:avLst>
           </a:prstGeom>
           <a:solidFill>
-            <a:srgbClr val="EFEAFA"/>
+            <a:srgbClr val="E8EAFA"/>
           </a:solidFill>
           <a:ln>
             <a:noFill/>
@@ -15847,7 +15847,7 @@
             <a:r>
               <a:rPr sz="1500" b="1" i="0">
                 <a:solidFill>
-                  <a:srgbClr val="6B4FBB"/>
+                  <a:srgbClr val="3B49A0"/>
                 </a:solidFill>
                 <a:latin typeface="Verdana"/>
               </a:rPr>
@@ -15967,7 +15967,7 @@
             </a:avLst>
           </a:prstGeom>
           <a:solidFill>
-            <a:srgbClr val="EFEAFA"/>
+            <a:srgbClr val="E8EAFA"/>
           </a:solidFill>
           <a:ln>
             <a:noFill/>
@@ -16024,7 +16024,7 @@
             <a:r>
               <a:rPr sz="1500" b="1" i="0">
                 <a:solidFill>
-                  <a:srgbClr val="6B4FBB"/>
+                  <a:srgbClr val="3B49A0"/>
                 </a:solidFill>
                 <a:latin typeface="Verdana"/>
               </a:rPr>
@@ -16144,7 +16144,7 @@
             </a:avLst>
           </a:prstGeom>
           <a:solidFill>
-            <a:srgbClr val="EFEAFA"/>
+            <a:srgbClr val="E8EAFA"/>
           </a:solidFill>
           <a:ln>
             <a:noFill/>
@@ -16201,7 +16201,7 @@
             <a:r>
               <a:rPr sz="1500" b="1" i="0">
                 <a:solidFill>
-                  <a:srgbClr val="6B4FBB"/>
+                  <a:srgbClr val="3B49A0"/>
                 </a:solidFill>
                 <a:latin typeface="Verdana"/>
               </a:rPr>
@@ -16321,7 +16321,7 @@
             </a:avLst>
           </a:prstGeom>
           <a:solidFill>
-            <a:srgbClr val="EFEAFA"/>
+            <a:srgbClr val="E8EAFA"/>
           </a:solidFill>
           <a:ln>
             <a:noFill/>
@@ -16378,7 +16378,7 @@
             <a:r>
               <a:rPr sz="1500" b="1" i="0">
                 <a:solidFill>
-                  <a:srgbClr val="6B4FBB"/>
+                  <a:srgbClr val="3B49A0"/>
                 </a:solidFill>
                 <a:latin typeface="Verdana"/>
               </a:rPr>
@@ -16498,7 +16498,7 @@
             </a:avLst>
           </a:prstGeom>
           <a:solidFill>
-            <a:srgbClr val="EFEAFA"/>
+            <a:srgbClr val="E8EAFA"/>
           </a:solidFill>
           <a:ln>
             <a:noFill/>
@@ -16555,7 +16555,7 @@
             <a:r>
               <a:rPr sz="1500" b="1" i="0">
                 <a:solidFill>
-                  <a:srgbClr val="6B4FBB"/>
+                  <a:srgbClr val="3B49A0"/>
                 </a:solidFill>
                 <a:latin typeface="Verdana"/>
               </a:rPr>
@@ -16675,7 +16675,7 @@
             </a:avLst>
           </a:prstGeom>
           <a:solidFill>
-            <a:srgbClr val="EFEAFA"/>
+            <a:srgbClr val="E8EAFA"/>
           </a:solidFill>
           <a:ln>
             <a:noFill/>
@@ -16732,7 +16732,7 @@
             <a:r>
               <a:rPr sz="1500" b="1" i="0">
                 <a:solidFill>
-                  <a:srgbClr val="6B4FBB"/>
+                  <a:srgbClr val="3B49A0"/>
                 </a:solidFill>
                 <a:latin typeface="Verdana"/>
               </a:rPr>
@@ -16852,7 +16852,7 @@
             </a:avLst>
           </a:prstGeom>
           <a:solidFill>
-            <a:srgbClr val="EFEAFA"/>
+            <a:srgbClr val="E8EAFA"/>
           </a:solidFill>
           <a:ln>
             <a:noFill/>
@@ -16909,7 +16909,7 @@
             <a:r>
               <a:rPr sz="1500" b="1" i="0">
                 <a:solidFill>
-                  <a:srgbClr val="6B4FBB"/>
+                  <a:srgbClr val="3B49A0"/>
                 </a:solidFill>
                 <a:latin typeface="Verdana"/>
               </a:rPr>
@@ -17134,7 +17134,7 @@
             <a:r>
               <a:rPr sz="1300" b="1" i="0" spc="156">
                 <a:solidFill>
-                  <a:srgbClr val="6B4FBB"/>
+                  <a:srgbClr val="3B49A0"/>
                 </a:solidFill>
                 <a:latin typeface="Verdana"/>
               </a:rPr>
@@ -17414,7 +17414,7 @@
             <a:r>
               <a:rPr sz="1400" b="1" i="0">
                 <a:solidFill>
-                  <a:srgbClr val="6B4FBB"/>
+                  <a:srgbClr val="3B49A0"/>
                 </a:solidFill>
                 <a:latin typeface="Verdana"/>
               </a:rPr>
@@ -17573,7 +17573,7 @@
             <a:r>
               <a:rPr sz="1400" b="1" i="0">
                 <a:solidFill>
-                  <a:srgbClr val="6B4FBB"/>
+                  <a:srgbClr val="3B49A0"/>
                 </a:solidFill>
                 <a:latin typeface="Verdana"/>
               </a:rPr>
@@ -17732,7 +17732,7 @@
             <a:r>
               <a:rPr sz="1400" b="1" i="0">
                 <a:solidFill>
-                  <a:srgbClr val="6B4FBB"/>
+                  <a:srgbClr val="3B49A0"/>
                 </a:solidFill>
                 <a:latin typeface="Verdana"/>
               </a:rPr>
@@ -17891,7 +17891,7 @@
             <a:r>
               <a:rPr sz="1400" b="1" i="0">
                 <a:solidFill>
-                  <a:srgbClr val="6B4FBB"/>
+                  <a:srgbClr val="3B49A0"/>
                 </a:solidFill>
                 <a:latin typeface="Verdana"/>
               </a:rPr>
@@ -18050,7 +18050,7 @@
             <a:r>
               <a:rPr sz="1400" b="1" i="0">
                 <a:solidFill>
-                  <a:srgbClr val="6B4FBB"/>
+                  <a:srgbClr val="3B49A0"/>
                 </a:solidFill>
                 <a:latin typeface="Verdana"/>
               </a:rPr>
